--- a/docs/deck/SignalDesk_Part2.pptx
+++ b/docs/deck/SignalDesk_Part2.pptx
@@ -2447,7 +2447,7 @@
                 <a:ea typeface="Calibri" pitchFamily="34" charset="-122"/>
                 <a:cs typeface="Calibri" pitchFamily="34" charset="-120"/>
               </a:rPr>
-              <a:t>So a $62 million protocol hack — the biggest story in the set — scored as untiered noise.</a:t>
+              <a:t>So a $62 million protocol hack scored ZERO on the keyword factor — untiered noise.</a:t>
             </a:r>
             <a:endParaRPr lang="en-US" sz="1350" dirty="0"/>
           </a:p>
@@ -2527,24 +2527,24 @@
         </p:nvSpPr>
         <p:spPr>
           <a:xfrm>
-            <a:off x="777240" y="3383280"/>
-            <a:ext cx="2103120" cy="713232"/>
-          </a:xfrm>
-          <a:prstGeom prst="rect">
-            <a:avLst/>
-          </a:prstGeom>
-          <a:noFill/>
-          <a:ln/>
-        </p:spPr>
-        <p:txBody>
-          <a:bodyPr wrap="square" lIns="0" tIns="0" rIns="0" bIns="0" rtlCol="0" anchor="ctr"/>
-          <a:lstStyle/>
-          <a:p>
-            <a:pPr indent="0" marL="0">
-              <a:buNone/>
-            </a:pPr>
-            <a:r>
-              <a:rPr lang="en-US" sz="3800" b="1" dirty="0">
+            <a:off x="731520" y="3419856"/>
+            <a:ext cx="2240280" cy="457200"/>
+          </a:xfrm>
+          <a:prstGeom prst="rect">
+            <a:avLst/>
+          </a:prstGeom>
+          <a:noFill/>
+          <a:ln/>
+        </p:spPr>
+        <p:txBody>
+          <a:bodyPr wrap="square" lIns="0" tIns="0" rIns="0" bIns="0" rtlCol="0" anchor="ctr"/>
+          <a:lstStyle/>
+          <a:p>
+            <a:pPr indent="0" marL="0">
+              <a:buNone/>
+            </a:pPr>
+            <a:r>
+              <a:rPr lang="en-US" sz="1900" b="1" dirty="0">
                 <a:solidFill>
                   <a:srgbClr val="5E7078"/>
                 </a:solidFill>
@@ -2552,9 +2552,9 @@
                 <a:ea typeface="Courier New" pitchFamily="34" charset="-122"/>
                 <a:cs typeface="Courier New" pitchFamily="34" charset="-120"/>
               </a:rPr>
-              <a:t>#7</a:t>
-            </a:r>
-            <a:endParaRPr lang="en-US" sz="3800" dirty="0"/>
+              <a:t>keyword 0.00</a:t>
+            </a:r>
+            <a:endParaRPr lang="en-US" sz="1900" dirty="0"/>
           </a:p>
         </p:txBody>
       </p:sp>
@@ -2566,24 +2566,24 @@
         </p:nvSpPr>
         <p:spPr>
           <a:xfrm>
-            <a:off x="777240" y="4114800"/>
-            <a:ext cx="2103120" cy="292608"/>
-          </a:xfrm>
-          <a:prstGeom prst="rect">
-            <a:avLst/>
-          </a:prstGeom>
-          <a:noFill/>
-          <a:ln/>
-        </p:spPr>
-        <p:txBody>
-          <a:bodyPr wrap="square" lIns="0" tIns="0" rIns="0" bIns="0" rtlCol="0" anchor="ctr"/>
-          <a:lstStyle/>
-          <a:p>
-            <a:pPr indent="0" marL="0">
-              <a:buNone/>
-            </a:pPr>
-            <a:r>
-              <a:rPr lang="en-US" sz="1300" dirty="0">
+            <a:off x="731520" y="3913632"/>
+            <a:ext cx="2240280" cy="457200"/>
+          </a:xfrm>
+          <a:prstGeom prst="rect">
+            <a:avLst/>
+          </a:prstGeom>
+          <a:noFill/>
+          <a:ln/>
+        </p:spPr>
+        <p:txBody>
+          <a:bodyPr wrap="square" lIns="0" tIns="0" rIns="0" bIns="0" rtlCol="0" anchor="ctr"/>
+          <a:lstStyle/>
+          <a:p>
+            <a:pPr indent="0" marL="0">
+              <a:buNone/>
+            </a:pPr>
+            <a:r>
+              <a:rPr lang="en-US" sz="2400" b="1" dirty="0">
                 <a:solidFill>
                   <a:srgbClr val="0E2A31"/>
                 </a:solidFill>
@@ -2591,9 +2591,9 @@
                 <a:ea typeface="Courier New" pitchFamily="34" charset="-122"/>
                 <a:cs typeface="Courier New" pitchFamily="34" charset="-120"/>
               </a:rPr>
-              <a:t>score 0.701</a:t>
-            </a:r>
-            <a:endParaRPr lang="en-US" sz="1300" dirty="0"/>
+              <a:t>rank 7</a:t>
+            </a:r>
+            <a:endParaRPr lang="en-US" sz="2400" dirty="0"/>
           </a:p>
         </p:txBody>
       </p:sp>
@@ -2671,24 +2671,24 @@
         </p:nvSpPr>
         <p:spPr>
           <a:xfrm>
-            <a:off x="3611880" y="3383280"/>
-            <a:ext cx="2103120" cy="713232"/>
-          </a:xfrm>
-          <a:prstGeom prst="rect">
-            <a:avLst/>
-          </a:prstGeom>
-          <a:noFill/>
-          <a:ln/>
-        </p:spPr>
-        <p:txBody>
-          <a:bodyPr wrap="square" lIns="0" tIns="0" rIns="0" bIns="0" rtlCol="0" anchor="ctr"/>
-          <a:lstStyle/>
-          <a:p>
-            <a:pPr indent="0" marL="0">
-              <a:buNone/>
-            </a:pPr>
-            <a:r>
-              <a:rPr lang="en-US" sz="3800" b="1" dirty="0">
+            <a:off x="3566160" y="3419856"/>
+            <a:ext cx="2240280" cy="457200"/>
+          </a:xfrm>
+          <a:prstGeom prst="rect">
+            <a:avLst/>
+          </a:prstGeom>
+          <a:noFill/>
+          <a:ln/>
+        </p:spPr>
+        <p:txBody>
+          <a:bodyPr wrap="square" lIns="0" tIns="0" rIns="0" bIns="0" rtlCol="0" anchor="ctr"/>
+          <a:lstStyle/>
+          <a:p>
+            <a:pPr indent="0" marL="0">
+              <a:buNone/>
+            </a:pPr>
+            <a:r>
+              <a:rPr lang="en-US" sz="1900" b="1" dirty="0">
                 <a:solidFill>
                   <a:srgbClr val="E8963C"/>
                 </a:solidFill>
@@ -2696,9 +2696,9 @@
                 <a:ea typeface="Courier New" pitchFamily="34" charset="-122"/>
                 <a:cs typeface="Courier New" pitchFamily="34" charset="-120"/>
               </a:rPr>
-              <a:t>#1</a:t>
-            </a:r>
-            <a:endParaRPr lang="en-US" sz="3800" dirty="0"/>
+              <a:t>keyword 1.00</a:t>
+            </a:r>
+            <a:endParaRPr lang="en-US" sz="1900" dirty="0"/>
           </a:p>
         </p:txBody>
       </p:sp>
@@ -2710,24 +2710,24 @@
         </p:nvSpPr>
         <p:spPr>
           <a:xfrm>
-            <a:off x="3611880" y="4114800"/>
-            <a:ext cx="2103120" cy="292608"/>
-          </a:xfrm>
-          <a:prstGeom prst="rect">
-            <a:avLst/>
-          </a:prstGeom>
-          <a:noFill/>
-          <a:ln/>
-        </p:spPr>
-        <p:txBody>
-          <a:bodyPr wrap="square" lIns="0" tIns="0" rIns="0" bIns="0" rtlCol="0" anchor="ctr"/>
-          <a:lstStyle/>
-          <a:p>
-            <a:pPr indent="0" marL="0">
-              <a:buNone/>
-            </a:pPr>
-            <a:r>
-              <a:rPr lang="en-US" sz="1300" dirty="0">
+            <a:off x="3566160" y="3913632"/>
+            <a:ext cx="2240280" cy="457200"/>
+          </a:xfrm>
+          <a:prstGeom prst="rect">
+            <a:avLst/>
+          </a:prstGeom>
+          <a:noFill/>
+          <a:ln/>
+        </p:spPr>
+        <p:txBody>
+          <a:bodyPr wrap="square" lIns="0" tIns="0" rIns="0" bIns="0" rtlCol="0" anchor="ctr"/>
+          <a:lstStyle/>
+          <a:p>
+            <a:pPr indent="0" marL="0">
+              <a:buNone/>
+            </a:pPr>
+            <a:r>
+              <a:rPr lang="en-US" sz="2400" b="1" dirty="0">
                 <a:solidFill>
                   <a:srgbClr val="FFFFFF"/>
                 </a:solidFill>
@@ -2735,9 +2735,9 @@
                 <a:ea typeface="Courier New" pitchFamily="34" charset="-122"/>
                 <a:cs typeface="Courier New" pitchFamily="34" charset="-120"/>
               </a:rPr>
-              <a:t>score 0.867</a:t>
-            </a:r>
-            <a:endParaRPr lang="en-US" sz="1300" dirty="0"/>
+              <a:t>rank 2</a:t>
+            </a:r>
+            <a:endParaRPr lang="en-US" sz="2400" dirty="0"/>
           </a:p>
         </p:txBody>
       </p:sp>
@@ -2840,7 +2840,7 @@
                 <a:ea typeface="Courier New" pitchFamily="34" charset="-122"/>
                 <a:cs typeface="Courier New" pitchFamily="34" charset="-120"/>
               </a:rPr>
-              <a:t>Screenshot --once output before and</a:t>
+              <a:t>Run:  python scripts/show_regex_bug.py</a:t>
             </a:r>
             <a:endParaRPr lang="en-US" sz="1150" dirty="0"/>
           </a:p>
@@ -2857,7 +2857,7 @@
                 <a:ea typeface="Courier New" pitchFamily="34" charset="-122"/>
                 <a:cs typeface="Courier New" pitchFamily="34" charset="-120"/>
               </a:rPr>
-              <a:t>after the fix, or the /why table showing</a:t>
+              <a:t>It prints both rankings side by side.</a:t>
             </a:r>
             <a:endParaRPr lang="en-US" sz="1150" dirty="0"/>
           </a:p>
@@ -2874,7 +2874,7 @@
                 <a:ea typeface="Courier New" pitchFamily="34" charset="-122"/>
                 <a:cs typeface="Courier New" pitchFamily="34" charset="-120"/>
               </a:rPr>
-              <a:t>keyword = 1.00 on the exploit story.</a:t>
+              <a:t>One terminal window is the whole slide.</a:t>
             </a:r>
             <a:endParaRPr lang="en-US" sz="1150" dirty="0"/>
           </a:p>
